--- a/slides/decks/s19-relapse-mrd-dli.pptx
+++ b/slides/decks/s19-relapse-mrd-dli.pptx
@@ -135,13 +135,13 @@
   <p:extLst>
     <p:ext uri="{521415D9-36F7-43E2-AB2F-B90AF26B5E84}">
       <p14:sectionLst xmlns:p14="http://schemas.microsoft.com/office/powerpoint/2010/main">
-        <p14:section name="Opening" id="{f7d94a37-020b-ed9d-7fba-88c775b2e9ca}">
+        <p14:section name="Opening" id="{82fdeb58-bfb1-09fc-48a2-30a580fa0cb7}">
           <p14:sldIdLst>
             <p14:sldId id="256"/>
             <p14:sldId id="257"/>
           </p14:sldIdLst>
         </p14:section>
-        <p14:section name="MRD" id="{37114c29-adbe-7869-47ba-5efdb4d8b911}">
+        <p14:section name="MRD" id="{e968c991-3744-050c-8d7b-eb7fd42246e3}">
           <p14:sldIdLst>
             <p14:sldId id="258"/>
             <p14:sldId id="259"/>
@@ -151,7 +151,7 @@
             <p14:sldId id="263"/>
           </p14:sldIdLst>
         </p14:section>
-        <p14:section name="Drugs" id="{eed5a58d-ba28-f2c8-f3c9-933b031d25a1}">
+        <p14:section name="Drugs" id="{f15b09a8-0694-46e7-6e56-b530d9db999c}">
           <p14:sldIdLst>
             <p14:sldId id="264"/>
             <p14:sldId id="265"/>
@@ -160,14 +160,14 @@
             <p14:sldId id="268"/>
           </p14:sldIdLst>
         </p14:section>
-        <p14:section name="Donor lymphocyte infusion" id="{0e49c7b9-75e8-cbdf-5006-d74a9863f329}">
+        <p14:section name="Donor lymphocyte infusion" id="{b79d8af0-6eaa-c5cc-2f8c-8a03c757a937}">
           <p14:sldIdLst>
             <p14:sldId id="269"/>
             <p14:sldId id="270"/>
             <p14:sldId id="271"/>
           </p14:sldIdLst>
         </p14:section>
-        <p14:section name="Board questions" id="{564da4d7-20ea-75d5-f8d6-5353aa0708dd}">
+        <p14:section name="Board questions" id="{b3e860eb-fe38-f2a2-3ac9-024f583c1314}">
           <p14:sldIdLst>
             <p14:sldId id="272"/>
             <p14:sldId id="273"/>
@@ -177,7 +177,7 @@
             <p14:sldId id="277"/>
           </p14:sldIdLst>
         </p14:section>
-        <p14:section name="References" id="{05e76f0d-ea0f-4ec5-e50a-37b9a2efafcb}">
+        <p14:section name="References" id="{b8c99215-aee7-34ed-bee5-8f59be46d072}">
           <p14:sldIdLst>
             <p14:sldId id="278"/>
             <p14:sldId id="279"/>
@@ -185,7 +185,7 @@
             <p14:sldId id="281"/>
           </p14:sldIdLst>
         </p14:section>
-        <p14:section name="Backup" id="{7bc1a7e3-6bf4-427a-83cc-067b5661cbfd}">
+        <p14:section name="Backup" id="{441c73d7-3591-e7a4-68bb-3b537ad5dd86}">
           <p14:sldIdLst>
             <p14:sldId id="282"/>
             <p14:sldId id="283"/>
